--- a/public/materialy/1L/7/Prezentace k hodinám/1. Bezpečné chování na internetu.pptx
+++ b/public/materialy/1L/7/Prezentace k hodinám/1. Bezpečné chování na internetu.pptx
@@ -548,7 +548,7 @@
           </a:p>
           <a:p xmlns:a="http://schemas.openxmlformats.org/drawingml/2006/main">
             <a:r>
-              <a:t>Soubory: Digitální pracovní sešit, 01_situace_bezpecnost.csv</a:t>
+              <a:t>Soubory: Digitální pracovní sešit, 1. Rizikové situace.csv</a:t>
             </a:r>
           </a:p>
           <a:p xmlns:a="http://schemas.openxmlformats.org/drawingml/2006/main">
@@ -808,7 +808,7 @@
           <a:lstStyle xmlns:a="http://schemas.openxmlformats.org/drawingml/2006/main"/>
           <a:p xmlns:a="http://schemas.openxmlformats.org/drawingml/2006/main">
             <a:r>
-              <a:t>Hlavní aktivita využívá: Digitální pracovní sešit, 01_situace_bezpecnost.csv</a:t>
+              <a:t>Hlavní aktivita využívá: Digitální pracovní sešit, 1. Rizikové situace.csv</a:t>
             </a:r>
           </a:p>
           <a:p xmlns:a="http://schemas.openxmlformats.org/drawingml/2006/main">
@@ -3674,7 +3674,7 @@
               </a:defRPr>
             </a:pPr>
             <a:r>
-              <a:t>Digitální pracovní sešit, 01_situace_bezpecnost.csv</a:t>
+              <a:t>Digitální pracovní sešit, 1. Rizikové situace.csv</a:t>
             </a:r>
           </a:p>
         </p:txBody>

--- a/public/materialy/1L/7/Prezentace k hodinám/1. Bezpečné chování na internetu.pptx
+++ b/public/materialy/1L/7/Prezentace k hodinám/1. Bezpečné chování na internetu.pptx
@@ -558,7 +558,7 @@
           </a:p>
           <a:p xmlns:a="http://schemas.openxmlformats.org/drawingml/2006/main">
             <a:r>
-              <a:t>Před otevřením dalšího snímku stručně uveďte téma a nechte studenty připravit pracovní soubory.</a:t>
+              <a:t>Před otevřením dalšího snímku stručně uveď téma a nech studenty připravit pracovní soubory.</a:t>
             </a:r>
           </a:p>
         </p:txBody>
@@ -638,7 +638,7 @@
           </a:p>
           <a:p xmlns:a="http://schemas.openxmlformats.org/drawingml/2006/main">
             <a:r>
-              <a:t>Postup učitele: Nechte studenty nejprve samostatně rozhodnout a zapsat první bezpečný krok.</a:t>
+              <a:t>Postup učitele: Nech studenty nejprve samostatně rozhodnout a zapsat první bezpečný krok.</a:t>
             </a:r>
           </a:p>
           <a:p xmlns:a="http://schemas.openxmlformats.org/drawingml/2006/main">
@@ -648,7 +648,7 @@
           </a:p>
           <a:p xmlns:a="http://schemas.openxmlformats.org/drawingml/2006/main">
             <a:r>
-              <a:t>Neprozrazujte správnou odpověď. Cílem je zachytit počáteční úsudek, ke kterému se třída vrátí při reflexi.</a:t>
+              <a:t>Neprozrazuj správnou odpověď. Cílem je zachytit počáteční úsudek, ke kterému se třída vrátí při reflexi.</a:t>
             </a:r>
           </a:p>
         </p:txBody>
@@ -728,7 +728,7 @@
           </a:p>
           <a:p xmlns:a="http://schemas.openxmlformats.org/drawingml/2006/main">
             <a:r>
-              <a:t>Postup učitele: Na tabuli sbírejte kontextové znaky: zdroj, naléhavost, požadovaná akce, dopad.</a:t>
+              <a:t>Postup učitele: Na tabuli sbírej kontextové znaky: zdroj, naléhavost, požadovaná akce, dopad.</a:t>
             </a:r>
           </a:p>
           <a:p xmlns:a="http://schemas.openxmlformats.org/drawingml/2006/main">
@@ -738,7 +738,7 @@
           </a:p>
           <a:p xmlns:a="http://schemas.openxmlformats.org/drawingml/2006/main">
             <a:r>
-              <a:t>Nechte studenty doplnit příklad ke každému bodu. Přechod k aktivitě proveďte otázkou: Jak tyto tři body použijeme na dnešní soubor?</a:t>
+              <a:t>Nech studenty doplnit příklad ke každému bodu. Přechod k aktivitě proveď otázkou: Jak tyto tři body použijeme na dnešní soubor?</a:t>
             </a:r>
           </a:p>
         </p:txBody>
@@ -813,17 +813,17 @@
           </a:p>
           <a:p xmlns:a="http://schemas.openxmlformats.org/drawingml/2006/main">
             <a:r>
-              <a:t>10–25 min – Analýza situací v CSV: Dvojice vyplňují tabulku; ptejte se na důvod, ne pouze na číslo.</a:t>
-            </a:r>
-          </a:p>
-          <a:p xmlns:a="http://schemas.openxmlformats.org/drawingml/2006/main">
-            <a:r>
-              <a:t>25–34 min – Porovnání rozhodnutí: Vyberte situace s rozdílným hodnocením a nechte skupiny obhájit podmínky.</a:t>
-            </a:r>
-          </a:p>
-          <a:p xmlns:a="http://schemas.openxmlformats.org/drawingml/2006/main">
-            <a:r>
-              <a:t>34–42 min – Třídní desatero: Trvejte na slovesech: ověř, zastav, nahlas, aktualizuj, nesdílej.</a:t>
+              <a:t>10–25 min – Analýza situací v CSV: Dvojice vyplňují tabulku; ptej se na důvod, ne pouze na číslo.</a:t>
+            </a:r>
+          </a:p>
+          <a:p xmlns:a="http://schemas.openxmlformats.org/drawingml/2006/main">
+            <a:r>
+              <a:t>25–34 min – Porovnání rozhodnutí: Vyber situace s rozdílným hodnocením a nech skupiny obhájit podmínky.</a:t>
+            </a:r>
+          </a:p>
+          <a:p xmlns:a="http://schemas.openxmlformats.org/drawingml/2006/main">
+            <a:r>
+              <a:t>34–42 min – Třídní desatero: Trvej na slovesech: ověř, zastav, nahlas, aktualizuj, nesdílej.</a:t>
             </a:r>
           </a:p>
           <a:p xmlns:a="http://schemas.openxmlformats.org/drawingml/2006/main">
@@ -833,7 +833,7 @@
           </a:p>
           <a:p xmlns:a="http://schemas.openxmlformats.org/drawingml/2006/main">
             <a:r>
-              <a:t>Během práce nepřebírejte myš za studenta. Pomáhejte otázkami z dalšího snímku a žádejte, aby každé rozhodnutí opřel o konkrétní znak nebo zdroj.</a:t>
+              <a:t>Během práce nepřebírej myš za studenta. Pomáhej otázkami z dalšího snímku a žádej, aby každé rozhodnutí opřel o konkrétní znak nebo zdroj.</a:t>
             </a:r>
           </a:p>
         </p:txBody>
@@ -913,7 +913,7 @@
           </a:p>
           <a:p xmlns:a="http://schemas.openxmlformats.org/drawingml/2006/main">
             <a:r>
-              <a:t>Podpora: Nechte studenty nejprve vyplnit pouze sloupce situace a bezpečný krok; míru rizika doplní při obhajobě.</a:t>
+              <a:t>Podpora: Nech studenty nejprve vyplnit pouze sloupce situace a bezpečný krok; míru rizika doplní při obhajobě.</a:t>
             </a:r>
           </a:p>
           <a:p xmlns:a="http://schemas.openxmlformats.org/drawingml/2006/main">
@@ -923,7 +923,7 @@
           </a:p>
           <a:p xmlns:a="http://schemas.openxmlformats.org/drawingml/2006/main">
             <a:r>
-              <a:t>Pro rychlou mezikontrolu nechte dvojice vyměnit výstup a označit jeden dobře doložený bod a jednu otázku, která ještě zůstává.</a:t>
+              <a:t>Pro rychlou mezikontrolu nech dvojice vyměnit výstup a označit jeden dobře doložený bod a jednu otázku, která ještě zůstává.</a:t>
             </a:r>
           </a:p>
         </p:txBody>
@@ -998,12 +998,12 @@
           </a:p>
           <a:p xmlns:a="http://schemas.openxmlformats.org/drawingml/2006/main">
             <a:r>
-              <a:t>Časté chyby a intervence: „Správné číslo rizika je vždy stejné.“ → Požadujte podmínky. Stejná situace může být podle kontextu běžná i závažná. | „HTTPS znamená bezpečný obsah.“ → Odlište ochranu přenosu od poctivosti provozovatele a pravdivosti tvrzení. | Student popisuje vlastní incident. → Zastavte zveřejňování detailů a vraťte diskusi k fiktivnímu zadání.</a:t>
-            </a:r>
-          </a:p>
-          <a:p xmlns:a="http://schemas.openxmlformats.org/drawingml/2006/main">
-            <a:r>
-              <a:t>Nečtěte celý klíč. Vyberte dva studentské postupy, které vedou k odlišným závěrům, a nechte třídu určit, který je lépe podložený.</a:t>
+              <a:t>Časté chyby a intervence: „Správné číslo rizika je vždy stejné.“ → Požaduj podmínky. Stejná situace může být podle kontextu běžná i závažná. | „HTTPS znamená bezpečný obsah.“ → Odliš ochranu přenosu od poctivosti provozovatele a pravdivosti tvrzení. | Student popisuje vlastní incident. → Zastav zveřejňování detailů a vrať diskusi k fiktivnímu zadání.</a:t>
+            </a:r>
+          </a:p>
+          <a:p xmlns:a="http://schemas.openxmlformats.org/drawingml/2006/main">
+            <a:r>
+              <a:t>Nečti celý klíč. Vyber dva studentské postupy, které vedou k odlišným závěrům, a nech třídu určit, který je lépe podložený.</a:t>
             </a:r>
           </a:p>
         </p:txBody>
@@ -1078,7 +1078,7 @@
           </a:p>
           <a:p xmlns:a="http://schemas.openxmlformats.org/drawingml/2006/main">
             <a:r>
-              <a:t>Podpora: Nechte studenty nejprve vyplnit pouze sloupce situace a bezpečný krok; míru rizika doplní při obhajobě.</a:t>
+              <a:t>Podpora: Nech studenty nejprve vyplnit pouze sloupce situace a bezpečný krok; míru rizika doplní při obhajobě.</a:t>
             </a:r>
           </a:p>
           <a:p xmlns:a="http://schemas.openxmlformats.org/drawingml/2006/main">
@@ -1093,7 +1093,7 @@
           </a:p>
           <a:p xmlns:a="http://schemas.openxmlformats.org/drawingml/2006/main">
             <a:r>
-              <a:t>Vyberte způsob odevzdání předem. Odpověď použijte jako diagnostiku pro začátek další hodiny; nehodnoťte pouze formální správnost, ale konkrétnost a zdůvodnění.</a:t>
+              <a:t>Vyber způsob odevzdání předem. Odpověď použij jako diagnostiku pro začátek další hodiny; nehodnoť pouze formální správnost, ale konkrétnost a zdůvodnění.</a:t>
             </a:r>
           </a:p>
         </p:txBody>

--- a/public/materialy/1L/7/Prezentace k hodinám/1. Bezpečné chování na internetu.pptx
+++ b/public/materialy/1L/7/Prezentace k hodinám/1. Bezpečné chování na internetu.pptx
@@ -543,7 +543,7 @@
           <a:lstStyle xmlns:a="http://schemas.openxmlformats.org/drawingml/2006/main"/>
           <a:p xmlns:a="http://schemas.openxmlformats.org/drawingml/2006/main">
             <a:r>
-              <a:t>Výukový cíl: Student rozpozná rizikovou online situaci, pojmenuje varovné znaky a navrhne nejmenší bezpečný další krok.</a:t>
+              <a:t>Výukový cíl: Student rozpozná rizikovou online situaci, pojmenuje varovné znaky a navrhne nejmenší bezpečný další krok.</a:t>
             </a:r>
           </a:p>
           <a:p xmlns:a="http://schemas.openxmlformats.org/drawingml/2006/main">
@@ -553,12 +553,12 @@
           </a:p>
           <a:p xmlns:a="http://schemas.openxmlformats.org/drawingml/2006/main">
             <a:r>
-              <a:t>Výstup: Vyplněná tabulka rizik a třídní desatero konkrétních pravidel.</a:t>
-            </a:r>
-          </a:p>
-          <a:p xmlns:a="http://schemas.openxmlformats.org/drawingml/2006/main">
-            <a:r>
-              <a:t>Před otevřením dalšího snímku stručně uveď téma a nech studenty připravit pracovní soubory.</a:t>
+              <a:t>Výstup: Vyplněná tabulka rizik a třídní desatero konkrétních pravidel.</a:t>
+            </a:r>
+          </a:p>
+          <a:p xmlns:a="http://schemas.openxmlformats.org/drawingml/2006/main">
+            <a:r>
+              <a:t>Před otevřením dalšího snímku stručně uveď téma a nech studenty připravit pracovní soubory.</a:t>
             </a:r>
           </a:p>
         </p:txBody>
@@ -638,7 +638,7 @@
           </a:p>
           <a:p xmlns:a="http://schemas.openxmlformats.org/drawingml/2006/main">
             <a:r>
-              <a:t>Postup učitele: Nech studenty nejprve samostatně rozhodnout a zapsat první bezpečný krok.</a:t>
+              <a:t>Postup učitele: Nech studenty nejprve samostatně rozhodnout a zapsat první bezpečný krok.</a:t>
             </a:r>
           </a:p>
           <a:p xmlns:a="http://schemas.openxmlformats.org/drawingml/2006/main">
@@ -733,12 +733,12 @@
           </a:p>
           <a:p xmlns:a="http://schemas.openxmlformats.org/drawingml/2006/main">
             <a:r>
-              <a:t>Klíčové závěry: Veřejná Wi‑Fi: Ověřit název sítě; citlivé služby raději nepoužívat nebo zvolit mobilní data či důvěryhodnou síť. | Oprávnění aplikace: Kontakty a poloha nejsou pro svítilnu nezbytné; oprávnění zamítnout nebo aplikaci nepoužít. | Aktualizace: Aktualizovat z nastavení systému či oficiálního obchodu, nikoli z náhodného vyskakovacího okna.</a:t>
-            </a:r>
-          </a:p>
-          <a:p xmlns:a="http://schemas.openxmlformats.org/drawingml/2006/main">
-            <a:r>
-              <a:t>Nech studenty doplnit příklad ke každému bodu. Přechod k aktivitě proveď otázkou: Jak tyto tři body použijeme na dnešní soubor?</a:t>
+              <a:t>Klíčové závěry: Veřejná Wi‑Fi: Ověřit název sítě; citlivé služby raději nepoužívat nebo zvolit mobilní data či důvěryhodnou síť. | Oprávnění aplikace: Kontakty a poloha nejsou pro svítilnu nezbytné; oprávnění zamítnout nebo aplikaci nepoužít. | Aktualizace: Aktualizovat z nastavení systému či oficiálního obchodu, nikoli z náhodného vyskakovacího okna.</a:t>
+            </a:r>
+          </a:p>
+          <a:p xmlns:a="http://schemas.openxmlformats.org/drawingml/2006/main">
+            <a:r>
+              <a:t>Nech studenty doplnit příklad ke každému bodu. Přechod k aktivitě proveď otázkou: Jak tyto tři body použijeme na dnešní soubor?</a:t>
             </a:r>
           </a:p>
         </p:txBody>
@@ -813,12 +813,12 @@
           </a:p>
           <a:p xmlns:a="http://schemas.openxmlformats.org/drawingml/2006/main">
             <a:r>
-              <a:t>10–25 min – Analýza situací v CSV: Dvojice vyplňují tabulku; ptej se na důvod, ne pouze na číslo.</a:t>
-            </a:r>
-          </a:p>
-          <a:p xmlns:a="http://schemas.openxmlformats.org/drawingml/2006/main">
-            <a:r>
-              <a:t>25–34 min – Porovnání rozhodnutí: Vyber situace s rozdílným hodnocením a nech skupiny obhájit podmínky.</a:t>
+              <a:t>10–25 min – Analýza situací v CSV: Dvojice vyplňují tabulku; ptej se na důvod, ne pouze na číslo.</a:t>
+            </a:r>
+          </a:p>
+          <a:p xmlns:a="http://schemas.openxmlformats.org/drawingml/2006/main">
+            <a:r>
+              <a:t>25–34 min – Porovnání rozhodnutí: Vyber situace s rozdílným hodnocením a nech skupiny obhájit podmínky.</a:t>
             </a:r>
           </a:p>
           <a:p xmlns:a="http://schemas.openxmlformats.org/drawingml/2006/main">
@@ -828,12 +828,12 @@
           </a:p>
           <a:p xmlns:a="http://schemas.openxmlformats.org/drawingml/2006/main">
             <a:r>
-              <a:t>Požadovaný výstup: Vyplněná tabulka rizik a třídní desatero konkrétních pravidel.</a:t>
-            </a:r>
-          </a:p>
-          <a:p xmlns:a="http://schemas.openxmlformats.org/drawingml/2006/main">
-            <a:r>
-              <a:t>Během práce nepřebírej myš za studenta. Pomáhej otázkami z dalšího snímku a žádej, aby každé rozhodnutí opřel o konkrétní znak nebo zdroj.</a:t>
+              <a:t>Požadovaný výstup: Vyplněná tabulka rizik a třídní desatero konkrétních pravidel.</a:t>
+            </a:r>
+          </a:p>
+          <a:p xmlns:a="http://schemas.openxmlformats.org/drawingml/2006/main">
+            <a:r>
+              <a:t>Během práce nepřebírej myš za studenta. Pomáhej otázkami z dalšího snímku a žádej, aby každé rozhodnutí opřel o konkrétní znak nebo zdroj.</a:t>
             </a:r>
           </a:p>
         </p:txBody>
@@ -903,7 +903,7 @@
           <a:lstStyle xmlns:a="http://schemas.openxmlformats.org/drawingml/2006/main"/>
           <a:p xmlns:a="http://schemas.openxmlformats.org/drawingml/2006/main">
             <a:r>
-              <a:t>Kritérium úspěchu: U nejméně pěti situací student uvede riziko, bezpečný postup a srozumitelné zdůvodnění.</a:t>
+              <a:t>Kritérium úspěchu: U nejméně pěti situací student uvede riziko, bezpečný postup a srozumitelné zdůvodnění.</a:t>
             </a:r>
           </a:p>
           <a:p xmlns:a="http://schemas.openxmlformats.org/drawingml/2006/main">
@@ -913,17 +913,17 @@
           </a:p>
           <a:p xmlns:a="http://schemas.openxmlformats.org/drawingml/2006/main">
             <a:r>
-              <a:t>Podpora: Nech studenty nejprve vyplnit pouze sloupce situace a bezpečný krok; míru rizika doplní při obhajobě.</a:t>
-            </a:r>
-          </a:p>
-          <a:p xmlns:a="http://schemas.openxmlformats.org/drawingml/2006/main">
-            <a:r>
-              <a:t>Rozšíření: Silnější skupina doplní, jak by se rozhodnutí změnilo v domácím, školním a veřejném prostředí.</a:t>
-            </a:r>
-          </a:p>
-          <a:p xmlns:a="http://schemas.openxmlformats.org/drawingml/2006/main">
-            <a:r>
-              <a:t>Pro rychlou mezikontrolu nech dvojice vyměnit výstup a označit jeden dobře doložený bod a jednu otázku, která ještě zůstává.</a:t>
+              <a:t>Podpora: Nech studenty nejprve vyplnit pouze sloupce situace a bezpečný krok; míru rizika doplní při obhajobě.</a:t>
+            </a:r>
+          </a:p>
+          <a:p xmlns:a="http://schemas.openxmlformats.org/drawingml/2006/main">
+            <a:r>
+              <a:t>Rozšíření: Silnější skupina doplní, jak by se rozhodnutí změnilo v domácím, školním a veřejném prostředí.</a:t>
+            </a:r>
+          </a:p>
+          <a:p xmlns:a="http://schemas.openxmlformats.org/drawingml/2006/main">
+            <a:r>
+              <a:t>Pro rychlou mezikontrolu nech dvojice vyměnit výstup a označit jeden dobře doložený bod a jednu otázku, která ještě zůstává.</a:t>
             </a:r>
           </a:p>
         </p:txBody>
@@ -993,17 +993,17 @@
           <a:lstStyle xmlns:a="http://schemas.openxmlformats.org/drawingml/2006/main"/>
           <a:p xmlns:a="http://schemas.openxmlformats.org/drawingml/2006/main">
             <a:r>
-              <a:t>Očekávané závěry: Veřejná Wi‑Fi: Ověřit název sítě; citlivé služby raději nepoužívat nebo zvolit mobilní data či důvěryhodnou síť. | Oprávnění aplikace: Kontakty a poloha nejsou pro svítilnu nezbytné; oprávnění zamítnout nebo aplikaci nepoužít. | Aktualizace: Aktualizovat z nastavení systému či oficiálního obchodu, nikoli z náhodného vyskakovacího okna. | Nalezené USB: Nepřipojovat ke školnímu počítači; předat správci nebo IT podpoře. | Ověřovací kód: Nikomu nepřeposílat; může potvrdit přihlášení, platbu nebo změnu účtu.</a:t>
-            </a:r>
-          </a:p>
-          <a:p xmlns:a="http://schemas.openxmlformats.org/drawingml/2006/main">
-            <a:r>
-              <a:t>Časté chyby a intervence: „Správné číslo rizika je vždy stejné.“ → Požaduj podmínky. Stejná situace může být podle kontextu běžná i závažná. | „HTTPS znamená bezpečný obsah.“ → Odliš ochranu přenosu od poctivosti provozovatele a pravdivosti tvrzení. | Student popisuje vlastní incident. → Zastav zveřejňování detailů a vrať diskusi k fiktivnímu zadání.</a:t>
-            </a:r>
-          </a:p>
-          <a:p xmlns:a="http://schemas.openxmlformats.org/drawingml/2006/main">
-            <a:r>
-              <a:t>Nečti celý klíč. Vyber dva studentské postupy, které vedou k odlišným závěrům, a nech třídu určit, který je lépe podložený.</a:t>
+              <a:t>Očekávané závěry: Veřejná Wi‑Fi: Ověřit název sítě; citlivé služby raději nepoužívat nebo zvolit mobilní data či důvěryhodnou síť. | Oprávnění aplikace: Kontakty a poloha nejsou pro svítilnu nezbytné; oprávnění zamítnout nebo aplikaci nepoužít. | Aktualizace: Aktualizovat z nastavení systému či oficiálního obchodu, nikoli z náhodného vyskakovacího okna. | Nalezené USB: Nepřipojovat ke školnímu počítači; předat správci nebo IT podpoře. | Ověřovací kód: Nikomu nepřeposílat; může potvrdit přihlášení, platbu nebo změnu účtu.</a:t>
+            </a:r>
+          </a:p>
+          <a:p xmlns:a="http://schemas.openxmlformats.org/drawingml/2006/main">
+            <a:r>
+              <a:t>Časté chyby a intervence: „Správné číslo rizika je vždy stejné.“ → Požaduj podmínky. Stejná situace může být podle kontextu běžná i závažná. | „HTTPS znamená bezpečný obsah.“ → Odliš ochranu přenosu od poctivosti provozovatele a pravdivosti tvrzení. | Student popisuje vlastní incident. → Zastav zveřejňování detailů a vrať diskusi k fiktivnímu zadání.</a:t>
+            </a:r>
+          </a:p>
+          <a:p xmlns:a="http://schemas.openxmlformats.org/drawingml/2006/main">
+            <a:r>
+              <a:t>Nečti celý klíč. Vyber dva studentské postupy, které vedou k odlišným závěrům, a nech třídu určit, který je lépe podložený.</a:t>
             </a:r>
           </a:p>
         </p:txBody>
@@ -1073,27 +1073,27 @@
           <a:lstStyle xmlns:a="http://schemas.openxmlformats.org/drawingml/2006/main"/>
           <a:p xmlns:a="http://schemas.openxmlformats.org/drawingml/2006/main">
             <a:r>
-              <a:t>Exit ticket: Doplň větu: Když mě online zpráva tlačí k rychlé akci, nejdřív…</a:t>
-            </a:r>
-          </a:p>
-          <a:p xmlns:a="http://schemas.openxmlformats.org/drawingml/2006/main">
-            <a:r>
-              <a:t>Podpora: Nech studenty nejprve vyplnit pouze sloupce situace a bezpečný krok; míru rizika doplní při obhajobě.</a:t>
-            </a:r>
-          </a:p>
-          <a:p xmlns:a="http://schemas.openxmlformats.org/drawingml/2006/main">
-            <a:r>
-              <a:t>Rozšíření: Silnější skupina doplní, jak by se rozhodnutí změnilo v domácím, školním a veřejném prostředí.</a:t>
-            </a:r>
-          </a:p>
-          <a:p xmlns:a="http://schemas.openxmlformats.org/drawingml/2006/main">
-            <a:r>
-              <a:t>Když technika selže: Pokud nefunguje tabulkový procesor, stejné situace jsou uvedené v pracovním sešitu a lze je vyplnit ve Wordu.</a:t>
-            </a:r>
-          </a:p>
-          <a:p xmlns:a="http://schemas.openxmlformats.org/drawingml/2006/main">
-            <a:r>
-              <a:t>Vyber způsob odevzdání předem. Odpověď použij jako diagnostiku pro začátek další hodiny; nehodnoť pouze formální správnost, ale konkrétnost a zdůvodnění.</a:t>
+              <a:t>Exit ticket: Doplň větu: Když mě online zpráva tlačí k rychlé akci, nejdřív…</a:t>
+            </a:r>
+          </a:p>
+          <a:p xmlns:a="http://schemas.openxmlformats.org/drawingml/2006/main">
+            <a:r>
+              <a:t>Podpora: Nech studenty nejprve vyplnit pouze sloupce situace a bezpečný krok; míru rizika doplní při obhajobě.</a:t>
+            </a:r>
+          </a:p>
+          <a:p xmlns:a="http://schemas.openxmlformats.org/drawingml/2006/main">
+            <a:r>
+              <a:t>Rozšíření: Silnější skupina doplní, jak by se rozhodnutí změnilo v domácím, školním a veřejném prostředí.</a:t>
+            </a:r>
+          </a:p>
+          <a:p xmlns:a="http://schemas.openxmlformats.org/drawingml/2006/main">
+            <a:r>
+              <a:t>Když technika selže: Pokud nefunguje tabulkový procesor, stejné situace jsou uvedené v pracovním sešitu a lze je vyplnit ve Wordu.</a:t>
+            </a:r>
+          </a:p>
+          <a:p xmlns:a="http://schemas.openxmlformats.org/drawingml/2006/main">
+            <a:r>
+              <a:t>Vyber způsob odevzdání předem. Odpověď použij jako diagnostiku pro začátek další hodiny; nehodnoť pouze formální správnost, ale konkrétnost a zdůvodnění.</a:t>
             </a:r>
           </a:p>
         </p:txBody>
@@ -1824,7 +1824,7 @@
             </a:pPr>
             <a:r>
               <a:t>INTERNET, BEZPEČNOST
-A PRÁCE S INFORMACEMI</a:t>
+A PRÁCE S INFORMACEMI</a:t>
             </a:r>
           </a:p>
         </p:txBody>
@@ -1914,7 +1914,7 @@
               </a:defRPr>
             </a:pPr>
             <a:r>
-              <a:t>Student rozpozná rizikovou online situaci, pojmenuje varovné znaky a navrhne nejmenší bezpečný další krok.</a:t>
+              <a:t>Student rozpozná rizikovou online situaci, pojmenuje varovné znaky a navrhne nejmenší bezpečný další krok.</a:t>
             </a:r>
           </a:p>
         </p:txBody>
@@ -2998,7 +2998,7 @@
               </a:defRPr>
             </a:pPr>
             <a:r>
-              <a:t>Naléhavost je důvod k pauze. Než klikneš nebo odpovíš, zjisti, co po tobě situace žádá.</a:t>
+              <a:t>Naléhavost je důvod k pauze. Než klikneš nebo odpovíš, zjisti, co po tobě situace žádá.</a:t>
             </a:r>
           </a:p>
         </p:txBody>
@@ -3133,7 +3133,7 @@
               </a:defRPr>
             </a:pPr>
             <a:r>
-              <a:t>Zkontroluj odesílatele, doménu a kontext. Důležitou žádost potvrď jiným známým kanálem.</a:t>
+              <a:t>Zkontroluj odesílatele, doménu a kontext. Důležitou žádost potvrď jiným známým kanálem.</a:t>
             </a:r>
           </a:p>
         </p:txBody>
@@ -3268,7 +3268,7 @@
               </a:defRPr>
             </a:pPr>
             <a:r>
-              <a:t>Neklikej, nic nesdílej a neinstaluj. Zvol krok, který situaci nezhorší a lze ho vrátit.</a:t>
+              <a:t>Neklikej, nic nesdílej a neinstaluj. Zvol krok, který situaci nezhorší a lze ho vrátit.</a:t>
             </a:r>
           </a:p>
         </p:txBody>
@@ -3344,7 +3344,7 @@
               </a:defRPr>
             </a:pPr>
             <a:r>
-              <a:t>Nejde o rychlý tip. Jde o postup, který lze vysvětlit a zopakovat.</a:t>
+              <a:t>Nejde o rychlý tip. Jde o postup, který lze vysvětlit a zopakovat.</a:t>
             </a:r>
           </a:p>
         </p:txBody>
@@ -3840,7 +3840,7 @@
               </a:defRPr>
             </a:pPr>
             <a:r>
-              <a:t>Ve dvojici doplň riziko, bezpečný krok a konkrétní důvod.</a:t>
+              <a:t>Ve dvojici doplň riziko, bezpečný krok a konkrétní důvod.</a:t>
             </a:r>
           </a:p>
         </p:txBody>
@@ -4006,7 +4006,7 @@
               </a:defRPr>
             </a:pPr>
             <a:r>
-              <a:t>Vyberte dvě situace, ve kterých se lišíte, a obhajte své podmínky.</a:t>
+              <a:t>Vyberte dvě situace, ve kterých se lišíte, a obhajte své podmínky.</a:t>
             </a:r>
           </a:p>
         </p:txBody>
@@ -4262,7 +4262,7 @@
               </a:defRPr>
             </a:pPr>
             <a:r>
-              <a:t>Vyplněná tabulka rizik a třídní desatero konkrétních pravidel.</a:t>
+              <a:t>Vyplněná tabulka rizik a třídní desatero konkrétních pravidel.</a:t>
             </a:r>
           </a:p>
         </p:txBody>
@@ -4668,7 +4668,7 @@
               </a:defRPr>
             </a:pPr>
             <a:r>
-              <a:t>U nejméně pěti situací student uvede riziko, bezpečný postup a srozumitelné zdůvodnění.</a:t>
+              <a:t>U nejméně pěti situací student uvede riziko, bezpečný postup a srozumitelné zdůvodnění.</a:t>
             </a:r>
           </a:p>
         </p:txBody>
@@ -5631,7 +5631,7 @@
               </a:defRPr>
             </a:pPr>
             <a:r>
-              <a:t>Kontakty a poloha nejsou pro svítilnu nezbytné; oprávnění zamítnout nebo aplikaci nepoužít.</a:t>
+              <a:t>Kontakty a poloha nejsou pro svítilnu nezbytné; oprávnění zamítnout nebo aplikaci nepoužít.</a:t>
             </a:r>
           </a:p>
         </p:txBody>
@@ -5721,7 +5721,7 @@
               </a:defRPr>
             </a:pPr>
             <a:r>
-              <a:t>Aktualizovat z nastavení systému či oficiálního obchodu, nikoli z náhodného vyskakovacího okna.</a:t>
+              <a:t>Aktualizovat z nastavení systému či oficiálního obchodu, nikoli z náhodného vyskakovacího okna.</a:t>
             </a:r>
           </a:p>
         </p:txBody>
@@ -5887,7 +5887,7 @@
               </a:defRPr>
             </a:pPr>
             <a:r>
-              <a:t>Požadujte podmínky. Stejná situace může být podle kontextu běžná i závažná.</a:t>
+              <a:t>Požadujte podmínky. Stejná situace může být podle kontextu běžná i závažná.</a:t>
             </a:r>
           </a:p>
         </p:txBody>
@@ -5932,7 +5932,7 @@
               </a:defRPr>
             </a:pPr>
             <a:r>
-              <a:t>Vrať se k úvodnímu rozhodnutí. Co bys teď změnil — a proč?</a:t>
+              <a:t>Vrať se k úvodnímu rozhodnutí. Co bys teď změnil — a proč?</a:t>
             </a:r>
           </a:p>
         </p:txBody>
@@ -6127,7 +6127,7 @@
               </a:defRPr>
             </a:pPr>
             <a:r>
-              <a:t>Doplň větu: Když mě online zpráva tlačí k rychlé akci, nejdřív…</a:t>
+              <a:t>Doplň větu: Když mě online zpráva tlačí k rychlé akci, nejdřív…</a:t>
             </a:r>
           </a:p>
         </p:txBody>
